--- a/slides/datasets-in-10-minutes-truthfulqa.pptx
+++ b/slides/datasets-in-10-minutes-truthfulqa.pptx
@@ -11427,7 +11427,7 @@
                 <a:ea typeface="Noto Sans CJK JP"/>
                 <a:cs typeface="Noto Sans"/>
               </a:rPr>
-              <a:t>論文§4.1・Fig.4。質問への自由生成を人が評価した値で、選択式の正解率ではない。</a:t>
+              <a:t>質問への自由生成を人が評価した値で、選択式の正解率ではない。</a:t>
             </a:r>
           </a:p>
         </p:txBody>
